--- a/RegWatch_AI_Broader_Pitch.pptx
+++ b/RegWatch_AI_Broader_Pitch.pptx
@@ -510,13 +510,32 @@
           <a:lstStyle/>
           <a:p>
             <a:r>
-              <a:rPr lang="en-US" dirty="0"/>
-              <a:t>00:00–00:25 — Opening with a universal problem.
-“Quick question: have you ever corrected an AI assistant, only for it to reuse an old preference or fact later? And a second question: what if that assistant wasn't just writing text, but scheduling a meeting, checking a technical specification or making a recommendation?
-“The risk isn't restricted to company chatbots. Any AI agent or workflow that depends on changing information can be wrong in a very confident way. RegWatch is designed to test that risk.”
-Pause briefly after the first question.</a:t>
-            </a:r>
-            <a:endParaRPr lang="en-US" dirty="0"/>
+              <a:t>00:00-00:25 - Opening. Two questions, one pause.</a:t>
+            </a:r>
+          </a:p>
+          <a:p/>
+          <a:p>
+            <a:r>
+              <a:t>"Quick question. Have you ever corrected an AI assistant - and then watched it use the old fact again, later?"</a:t>
+            </a:r>
+          </a:p>
+          <a:p/>
+          <a:p>
+            <a:r>
+              <a:t>(PAUSE. Let hands go up. That's your permission to keep going.)</a:t>
+            </a:r>
+          </a:p>
+          <a:p/>
+          <a:p>
+            <a:r>
+              <a:t>"Second question. What if that assistant wasn't writing text, but booking the meeting, checking the safety spec, or approving the refund?</a:t>
+            </a:r>
+          </a:p>
+          <a:p/>
+          <a:p>
+            <a:r>
+              <a:t>That's the gap we built RegWatch to test." </a:t>
+            </a:r>
           </a:p>
         </p:txBody>
       </p:sp>
@@ -601,10 +620,50 @@
           <a:lstStyle/>
           <a:p>
             <a:r>
-              <a:rPr lang="en-US" dirty="0"/>
-              <a:t>Appendix. The Air Canada case is misadvice, not established outdated-memory retrieval. Broad personal, HR and engineering examples are hypothetical. The working prototype performs controlled tests and measures accessible evidence, not universal agent monitoring or automatic repair. Personal and enterprise plug-ins are future product ideas.</a:t>
-            </a:r>
-            <a:endParaRPr lang="en-US" dirty="0"/>
+              <a:t>APPENDIX - DO NOT PRESENT. Here for judges' questions.</a:t>
+            </a:r>
+          </a:p>
+          <a:p/>
+          <a:p>
+            <a:r>
+              <a:t>IF THEY ASK:</a:t>
+            </a:r>
+          </a:p>
+          <a:p/>
+          <a:p>
+            <a:r>
+              <a:t>"Isn't this just evals?" - Model evals score the ANSWER. We score the CONTEXT the answer came from. A model that's perfect can still be handed a dead fact, and no model eval catches that, because the model did nothing wrong.</a:t>
+            </a:r>
+          </a:p>
+          <a:p/>
+          <a:p>
+            <a:r>
+              <a:t>"Why synthetic data?" - One fictional client and an invented versioned policy, so there's no real client data and the answer key is provably correct. The method transfers to real approved histories; honest scoring depends on knowing ground truth, which we only do here.</a:t>
+            </a:r>
+          </a:p>
+          <a:p/>
+          <a:p>
+            <a:r>
+              <a:t>"Only one model and a hundred questions - thin?" - Yes, and the limitations say so. Per-bucket samples run 7 to 34. We're not claiming a general law. We're claiming the memory layer is a measurable variable nobody was measuring, and here's the harness.</a:t>
+            </a:r>
+          </a:p>
+          <a:p/>
+          <a:p>
+            <a:r>
+              <a:t>"Could you test my agent?" - If its memory is accessible and you can authorise a test history, yes. We cannot read hidden memory inside a third-party service, and we don't pretend to.</a:t>
+            </a:r>
+          </a:p>
+          <a:p/>
+          <a:p>
+            <a:r>
+              <a:t>"Why Opus?" - We ran both. On Haiku the spread is wider, 22 to 92, because the reducer degrades more on the smaller model. Both logs are committed. We quote Opus because it's the harder case for our own argument.</a:t>
+            </a:r>
+          </a:p>
+          <a:p/>
+          <a:p>
+            <a:r>
+              <a:t>"What does it cost to run?" - About seven dollars for all 300 answers on Opus. Rates come from a pricing file where every number carries its source and date; an unconfirmed model reports cost as unknown, never zero.</a:t>
+            </a:r>
           </a:p>
         </p:txBody>
       </p:sp>
@@ -689,14 +748,44 @@
           <a:lstStyle/>
           <a:p>
             <a:r>
-              <a:rPr lang="en-US" dirty="0"/>
-              <a:t>00:25–01:10 — Real evidence.
-“In 2024, an Air Canada customer relied on a chatbot that incorrectly described the airline's bereavement-fare policy. A tribunal awarded C$650.88 in damages. This case is important because a confident AI answer had a real consequence—and the airline was accountable.
-“To be precise, that case does not establish that outdated memory caused the error. That's the more specific failure mode we're testing. The wider concern is real: KPMG surveyed 40 UK board members in 2024, and 60 percent cited inaccurate generative-AI results as a concern.
-“What happens when an AI assistant or agent uses information that was once correct but has since changed?”
-Sources: American Bar Association summary of Moffatt v Air Canada; KPMG UK board survey, August 2024.</a:t>
-            </a:r>
-            <a:endParaRPr lang="en-US" dirty="0"/>
+              <a:t>00:25-01:05 - Evidence. Three cases, escalating.</a:t>
+            </a:r>
+          </a:p>
+          <a:p/>
+          <a:p>
+            <a:r>
+              <a:t>"Three documented failures. They escalate.</a:t>
+            </a:r>
+          </a:p>
+          <a:p/>
+          <a:p>
+            <a:r>
+              <a:t>AIR CANADA, 2024. Their chatbot invented a refund policy. The airline argued in front of a tribunal that the chatbot was a SEPARATE LEGAL ENTITY, responsible for its own answers. The tribunal called that remarkable, and rejected it. What your assistant says is what your company said.</a:t>
+            </a:r>
+          </a:p>
+          <a:p/>
+          <a:p>
+            <a:r>
+              <a:t>ZILLOW, 2021. Three hundred and four million dollars of inventory written off in a single quarter, because the pricing model's picture of the market fell behind the market. They shut the business down and cut a quarter of the company. A stale view of the world, priced at scale.</a:t>
+            </a:r>
+          </a:p>
+          <a:p/>
+          <a:p>
+            <a:r>
+              <a:t>NEW YORK CITY, 2024. The city's official business chatbot told owners they could take their workers' tips, and refuse tenants on rental assistance. Reporters published it. It stayed online.</a:t>
+            </a:r>
+          </a:p>
+          <a:p/>
+          <a:p>
+            <a:r>
+              <a:t>Three different causes. One shared gap - nothing tested the answer before someone relied on it."</a:t>
+            </a:r>
+          </a:p>
+          <a:p/>
+          <a:p>
+            <a:r>
+              <a:t>STAGE: The third one is the point. Liability and cost are setup; "no test existed" is why you're on stage. Land it and move.</a:t>
+            </a:r>
           </a:p>
         </p:txBody>
       </p:sp>
@@ -781,12 +870,38 @@
           <a:lstStyle/>
           <a:p>
             <a:r>
-              <a:rPr lang="en-US" dirty="0"/>
-              <a:t>01:10–01:45 — Broad framing with four fictional scenarios.
-“This is not just an airline or finance problem. Imagine a personal AI travel assistant remembering an old travel date; a hiring agent scheduling around outdated availability; an engineering copilot referring to a superseded requirement; or a support chatbot applying an old refund policy.
-“The consequences differ, but the failure pattern is the same: an AI system uses outdated context in a new answer or action. We don't claim all these systems fail in practice. They are examples of situations RegWatch can be adapted to test when an authorised history and a verified answer key are available.”</a:t>
-            </a:r>
-            <a:endParaRPr lang="en-US" dirty="0"/>
+              <a:t>01:05-01:35 - Two directions.</a:t>
+            </a:r>
+          </a:p>
+          <a:p/>
+          <a:p>
+            <a:r>
+              <a:t>"This isn't a finance problem or an airline problem. A travel assistant plans around dates you changed. A scheduling agent picks availability a candidate withdrew. A support bot quotes the old refund window.</a:t>
+            </a:r>
+          </a:p>
+          <a:p/>
+          <a:p>
+            <a:r>
+              <a:t>And it breaks in two directions, not one. Memory can KEEP THE DEAD - the superseded fact is still sitting in the context. Or it can LOSE THE LIVING - you trimmed to save tokens and the current fact went with it.</a:t>
+            </a:r>
+          </a:p>
+          <a:p/>
+          <a:p>
+            <a:r>
+              <a:t>From the outside both look identical: a fluent, confident assistant."</a:t>
+            </a:r>
+          </a:p>
+          <a:p/>
+          <a:p>
+            <a:r>
+              <a:t>STAGE: "Keep the dead / lose the living" is the most memorable phrasing in the deck. Say it slowly.</a:t>
+            </a:r>
+          </a:p>
+          <a:p/>
+          <a:p>
+            <a:r>
+              <a:t>CUT THIS SLIDE TO ONE SENTENCE if you are running long.</a:t>
+            </a:r>
           </a:p>
         </p:txBody>
       </p:sp>
@@ -871,12 +986,32 @@
           <a:lstStyle/>
           <a:p>
             <a:r>
-              <a:rPr lang="en-US" dirty="0"/>
-              <a:t>01:45–02:20 — What the product does.
-“RegWatch is not another chatbot. Think of it as a safety exam for any AI system that relies on memory or retrieved context. We replay controlled histories with old facts and later updates. Our harness generates targeted questions and stores independently verified expected answers. We then ask the AI, check what it says, and flag failures with inspectable evidence where available.
-“Our working prototype is a Python evaluation harness with a browser dashboard. This is an evaluation product today, not an automatic repair tool, and it cannot look inside private memories belonging to unrelated AI products without an authorised integration.”</a:t>
-            </a:r>
-            <a:endParaRPr lang="en-US" dirty="0"/>
+              <a:t>01:35-02:10 - Method and stack.</a:t>
+            </a:r>
+          </a:p>
+          <a:p/>
+          <a:p>
+            <a:r>
+              <a:t>"Four steps. REPLAY a controlled history: dated facts, then later updates. PROBE it with targeted questions. VERIFY against an answer key built independently, by code - not one model grading another. EXPLAIN the failure with the evidence that caused it.</a:t>
+            </a:r>
+          </a:p>
+          <a:p/>
+          <a:p>
+            <a:r>
+              <a:t>Underneath: Python, LiteLLM, Claude Opus, a deterministic scorer with a pytest suite, and a Streamlit dashboard over a JSONL log.</a:t>
+            </a:r>
+          </a:p>
+          <a:p/>
+          <a:p>
+            <a:r>
+              <a:t>The important part is the bottom strip. Three memory backends - full history, a latest-per-key reducer, a token-budget trimmer - behind one frozen interface. Same model, same system prompt, every time. THE MEMORY LAYER IS THE ONLY VARIABLE."</a:t>
+            </a:r>
+          </a:p>
+          <a:p/>
+          <a:p>
+            <a:r>
+              <a:t>STAGE: For a non-technical room the four verbs are enough. The stack line is for the engineers - say it fast, don't explain it.</a:t>
+            </a:r>
           </a:p>
         </p:txBody>
       </p:sp>
@@ -961,14 +1096,56 @@
           <a:lstStyle/>
           <a:p>
             <a:r>
-              <a:rPr lang="en-US" dirty="0"/>
-              <a:t>02:20–04:00 — Demo for 90–100 seconds.
-“Now imagine you're an engineer deciding whether an assistant or agent can be trusted to remember updates. Our current demonstration uses a synthetic client whose risk preference changed. That is only one test scenario: the same harness can test a company's policy, a scheduling assistant or a technical requirement with suitable approved test data.
-“Here's the old fact, the later correction, and the probe question. Now we compare the actual answers from the memory implementations we have working. Here is what the independent answer key says. Let me open one real failed test and show the retrieved context when it is available.
-“From this, developers have evidence to review or adjust the memory approach and retest.”
-If replaying saved actual outputs say “recorded results”; if synthetic fixtures, say “illustrative UI”. Never promise unavailable integrations work.</a:t>
-            </a:r>
-            <a:endParaRPr lang="en-US" dirty="0"/>
+              <a:t>02:10-03:45 - DEMO. 90 seconds, hard stop. Switch to the browser.</a:t>
+            </a:r>
+          </a:p>
+          <a:p/>
+          <a:p>
+            <a:r>
+              <a:t>"A client told their adviser in January they were crypto-heavy and aggressive. In March they divested and turned conservative. In April, someone asks the assistant whether a high-risk crypto ETF is suitable.</a:t>
+            </a:r>
+          </a:p>
+          <a:p/>
+          <a:p>
+            <a:r>
+              <a:t>Nobody typed anything wrong. The January note was true in January."</a:t>
+            </a:r>
+          </a:p>
+          <a:p/>
+          <a:p>
+            <a:r>
+              <a:t>(Show: old fact, the correction, the probe.)</a:t>
+            </a:r>
+          </a:p>
+          <a:p/>
+          <a:p>
+            <a:r>
+              <a:t>"Same question, three memory layers, side by side. Here's what each one actually answered. Here's what the dated answer key says was true in April."</a:t>
+            </a:r>
+          </a:p>
+          <a:p/>
+          <a:p>
+            <a:r>
+              <a:t>(Open one real failure.)</a:t>
+            </a:r>
+          </a:p>
+          <a:p/>
+          <a:p>
+            <a:r>
+              <a:t>"And this is the part that matters for governance - not just that it's wrong, but the exact context the memory layer handed the model. That's the evidence an assurance team needs to act."</a:t>
+            </a:r>
+          </a:p>
+          <a:p/>
+          <a:p>
+            <a:r>
+              <a:t>IF THE DEMO MISBEHAVES: "the committed run is in the repo and the dashboard opens on it" - then go to slide 7. Do not debug on stage.</a:t>
+            </a:r>
+          </a:p>
+          <a:p/>
+          <a:p>
+            <a:r>
+              <a:t>BEFORE YOU START: have the dashboard already open on the Opus run in a second tab.</a:t>
+            </a:r>
           </a:p>
         </p:txBody>
       </p:sp>
@@ -1053,13 +1230,26 @@
           <a:lstStyle/>
           <a:p>
             <a:r>
-              <a:rPr lang="en-US" dirty="0"/>
-              <a:t>04:00–04:45 — Explain the before and after.
-“Without a check, a wrong answer can sound sensible. And if the AI is an agent, that mistake can turn into an action—booking the wrong time, drafting from an obsolete policy or following an old specification.
-“RegWatch lets the team reproduce the situation, see the failure against the correct dated fact, inspect the evidence and retest after making a change. That is the before-and-after: from an invisible memory risk to measurable evidence and a human decision.
-“The current prototype identifies problems and supports investigation. Automated repair, deployment blocking and intelligent recommendations are a roadmap, not capabilities we claim to have deployed.”</a:t>
-            </a:r>
-            <a:endParaRPr lang="en-US" dirty="0"/>
+              <a:t>03:45-04:20 - Before and after.</a:t>
+            </a:r>
+          </a:p>
+          <a:p/>
+          <a:p>
+            <a:r>
+              <a:t>"Without a check, the wrong answer sounds right and cites the file. There's no systematic test for updates, so you find out late - from a customer, or a tribunal.</a:t>
+            </a:r>
+          </a:p>
+          <a:p/>
+          <a:p>
+            <a:r>
+              <a:t>With RegWatch: the wrong answer is flagged, the old and the applicable fact are both shown, and the owner can investigate and retest.</a:t>
+            </a:r>
+          </a:p>
+          <a:p/>
+          <a:p>
+            <a:r>
+              <a:t>We identify and evidence failures. We don't automatically repair them - that's deliberate. A human makes the call." </a:t>
+            </a:r>
           </a:p>
         </p:txBody>
       </p:sp>
@@ -1144,12 +1334,61 @@
           <a:lstStyle/>
           <a:p>
             <a:r>
-              <a:rPr lang="en-US" dirty="0"/>
-              <a:t>04:45–05:20 — Trade-off.
-“AI developers often shorten context or summarise memory to lower costs. But removing important updates can turn a cheap response into a costly mistake. We're adding token use, latency and answer-cost comparison alongside correctness.
-“This is valuable for any AI workflow, not only chatbots. We are measuring a trade-off rather than building a brand new compression system. And if a memory provider makes unobserved ingestion calls, we only report the costs we can observe and label that scope honestly.”</a:t>
-            </a:r>
-            <a:endParaRPr lang="en-US" dirty="0"/>
+              <a:t>04:20-05:25 - THE SLIDE. Slow down. Point at the table, don't read it aloud.</a:t>
+            </a:r>
+          </a:p>
+          <a:p>
+            <a:r>
+              <a:t>NEVER CUT TIME FROM THIS SLIDE.</a:t>
+            </a:r>
+          </a:p>
+          <a:p/>
+          <a:p>
+            <a:r>
+              <a:t>"A hundred dated questions. Three memory layers. Three hundred live answers on Claude Opus, same prompt throughout, scored by code.</a:t>
+            </a:r>
+          </a:p>
+          <a:p/>
+          <a:p>
+            <a:r>
+              <a:t>Keep everything: eighty-eight out of a hundred. The latest-per-key reducer: eighty-six - at FORTY-FOUR PERCENT OF THE TOKENS. And trim-to-budget: TWENTY-FOUR.</a:t>
+            </a:r>
+          </a:p>
+          <a:p/>
+          <a:p>
+            <a:r>
+              <a:t>That spread, twenty-four to eighty-eight, is the memory layer alone. Nothing else changed.</a:t>
+            </a:r>
+          </a:p>
+          <a:p/>
+          <a:p>
+            <a:r>
+              <a:t>Now look at the cost. Trimming is the cheapest per query - and the most expensive per CORRECT answer, nearly five times the reducer. Because you pay for all forty-nine answers it couldn't give. 'Cheapest' is the wrong question.</a:t>
+            </a:r>
+          </a:p>
+          <a:p/>
+          <a:p>
+            <a:r>
+              <a:t>And then the thing we didn't want." (POINT RIGHT.) "Our hypothesis was that stale facts poison answers. We tested it - removed the one line telling the model to prefer recent facts, re-ran all three hundred. Twelve answers broke. NONE OF THEM had a stale fact in context. Fifty-eight other answers did.</a:t>
+            </a:r>
+          </a:p>
+          <a:p/>
+          <a:p>
+            <a:r>
+              <a:t>So the damage wasn't contamination. Every loss landed on the layer that DROPS facts. On this model, the adviser fails by forgetting - not by remembering too much.</a:t>
+            </a:r>
+          </a:p>
+          <a:p/>
+          <a:p>
+            <a:r>
+              <a:t>We shipped the result that disagreed with us. A benchmark that only confirms what you hoped isn't measuring anything."</a:t>
+            </a:r>
+          </a:p>
+          <a:p/>
+          <a:p>
+            <a:r>
+              <a:t>STAGE: That last line is your strongest moment. Say it and STOP. Let it sit before slide 8.</a:t>
+            </a:r>
           </a:p>
         </p:txBody>
       </p:sp>
@@ -1234,13 +1473,32 @@
           <a:lstStyle/>
           <a:p>
             <a:r>
-              <a:rPr lang="en-US" dirty="0"/>
-              <a:t>05:20–06:10 — Governance and users.
-“Our direct users today are the engineers who build AI systems and the teams who have to assure them before release. Think software developers, systems engineers and compliance reviewers. But the people affected are much broader: employees, customers and individuals who rely on AI-generated responses or actions.
-“Later this could also be useful directly for an individual who wants to test their own agent, using their own approved conversation history and reference facts. That personal integration isn't built yet.
-“Governance and Compliance is our main track: repeatable testing, independent expectations, logged evidence, and accountable human review. Explainability and Transparency is the supporting track: where possible, we reveal which context reached the model and why an answer failed. We do not claim RegWatch certifies safety or compliance.”</a:t>
-            </a:r>
-            <a:endParaRPr lang="en-US" dirty="0"/>
+              <a:t>05:25-06:05 - Users and governance.</a:t>
+            </a:r>
+          </a:p>
+          <a:p/>
+          <a:p>
+            <a:r>
+              <a:t>"Today: the engineers who build these systems, and the assurance teams who have to sign them off before release. Test, record the evidence, flag the risk, human review.</a:t>
+            </a:r>
+          </a:p>
+          <a:p/>
+          <a:p>
+            <a:r>
+              <a:t>Individuals testing their own agents is future work - it's labelled on the slide because it isn't built.</a:t>
+            </a:r>
+          </a:p>
+          <a:p/>
+          <a:p>
+            <a:r>
+              <a:t>Main track is Governance and Compliance, supported by Explainability and Transparency. One honest limit: this is an assurance tool. It is not a compliance certification, and we don't claim it is."</a:t>
+            </a:r>
+          </a:p>
+          <a:p/>
+          <a:p>
+            <a:r>
+              <a:t>CUT TO TWO SENTENCES if running long.</a:t>
+            </a:r>
           </a:p>
         </p:txBody>
       </p:sp>
@@ -1325,13 +1583,26 @@
           <a:lstStyle/>
           <a:p>
             <a:r>
-              <a:rPr lang="en-US" dirty="0"/>
-              <a:t>06:10–06:50 — Roadmap and close.
-“Today RegWatch is a working prototype built around controlled synthetic histories, test questions and a results interface. The first scale-up is for developers: connect an authorised AI application by API, ship RegWatch as a Python package or CI test, and rerun memory checks when prompts, retrieval logic or policies change.
-“The longer-term vision is broader still: individuals could use an opt-in agent skill or app to check their own assistants using information they choose to share. Neither of those integrations exists in today's prototype, and we cannot access a private AI's hidden memory automatically.
-“Whether the user is a systems engineer or an individual relying on an agent, the goal is the same: test AI memory before decisions depend on it.”</a:t>
-            </a:r>
-            <a:endParaRPr lang="en-US" dirty="0"/>
+              <a:t>06:05-06:40 - Roadmap and close.</a:t>
+            </a:r>
+          </a:p>
+          <a:p/>
+          <a:p>
+            <a:r>
+              <a:t>"Today it's a browser prototype on controlled synthetic histories. Next is the developer integration - a Python package and a CI check, so memory gets retested every time a prompt or a retrieval rule changes. Longer term, an opt-in check for personal assistants.</a:t>
+            </a:r>
+          </a:p>
+          <a:p/>
+          <a:p>
+            <a:r>
+              <a:t>Everything you've seen is in the repo: the logs, the answer key, and the script that reproduces the numbers on slide seven from a clean clone.</a:t>
+            </a:r>
+          </a:p>
+          <a:p/>
+          <a:p>
+            <a:r>
+              <a:t>TEST AI MEMORY BEFORE DECISIONS DEPEND ON IT. Thank you." </a:t>
+            </a:r>
           </a:p>
         </p:txBody>
       </p:sp>
